--- a/tests/benchmark/architectural_slides/case_020_synthesis_canvas/output.pptx
+++ b/tests/benchmark/architectural_slides/case_020_synthesis_canvas/output.pptx
@@ -910,7 +910,7 @@
         <p:spPr>
           <a:xfrm>
             <a:off x="640080" y="411480"/>
-            <a:ext cx="7863840" cy="411480"/>
+            <a:ext cx="7863840" cy="601218"/>
           </a:xfrm>
           <a:prstGeom prst="rect">
             <a:avLst/>
@@ -948,8 +948,8 @@
         </p:nvSpPr>
         <p:spPr>
           <a:xfrm>
-            <a:off x="640080" y="899160"/>
-            <a:ext cx="4009949" cy="3256788"/>
+            <a:off x="640080" y="1088898"/>
+            <a:ext cx="4009949" cy="3067050"/>
           </a:xfrm>
           <a:prstGeom prst="rect">
             <a:avLst/>
@@ -973,7 +973,7 @@
         </p:nvSpPr>
         <p:spPr>
           <a:xfrm>
-            <a:off x="777240" y="2344674"/>
+            <a:off x="777240" y="2439543"/>
             <a:ext cx="3735629" cy="365760"/>
           </a:xfrm>
           <a:prstGeom prst="rect">
@@ -1012,8 +1012,8 @@
         </p:nvSpPr>
         <p:spPr>
           <a:xfrm>
-            <a:off x="4802429" y="899160"/>
-            <a:ext cx="3701491" cy="1234440"/>
+            <a:off x="4802429" y="1088898"/>
+            <a:ext cx="3701491" cy="1165479"/>
           </a:xfrm>
           <a:prstGeom prst="rect">
             <a:avLst/>
@@ -1037,7 +1037,7 @@
         </p:nvSpPr>
         <p:spPr>
           <a:xfrm>
-            <a:off x="4939589" y="1333500"/>
+            <a:off x="4939589" y="1488758"/>
             <a:ext cx="3427171" cy="365760"/>
           </a:xfrm>
           <a:prstGeom prst="rect">
@@ -1076,8 +1076,8 @@
         </p:nvSpPr>
         <p:spPr>
           <a:xfrm>
-            <a:off x="4802429" y="2209800"/>
-            <a:ext cx="1208430" cy="640080"/>
+            <a:off x="4802429" y="2330577"/>
+            <a:ext cx="1208430" cy="772668"/>
           </a:xfrm>
           <a:prstGeom prst="rect">
             <a:avLst/>
@@ -1115,8 +1115,8 @@
         </p:nvSpPr>
         <p:spPr>
           <a:xfrm>
-            <a:off x="6048959" y="2209800"/>
-            <a:ext cx="1208430" cy="640080"/>
+            <a:off x="6048959" y="2330577"/>
+            <a:ext cx="1208430" cy="772668"/>
           </a:xfrm>
           <a:prstGeom prst="rect">
             <a:avLst/>
@@ -1154,8 +1154,8 @@
         </p:nvSpPr>
         <p:spPr>
           <a:xfrm>
-            <a:off x="7295490" y="2209800"/>
-            <a:ext cx="1208430" cy="640080"/>
+            <a:off x="7295490" y="2330577"/>
+            <a:ext cx="1208430" cy="772668"/>
           </a:xfrm>
           <a:prstGeom prst="rect">
             <a:avLst/>
@@ -1193,8 +1193,8 @@
         </p:nvSpPr>
         <p:spPr>
           <a:xfrm>
-            <a:off x="4802429" y="2926080"/>
-            <a:ext cx="3701491" cy="430454"/>
+            <a:off x="4802429" y="3179445"/>
+            <a:ext cx="3701491" cy="635508"/>
           </a:xfrm>
           <a:prstGeom prst="rect">
             <a:avLst/>
@@ -1232,8 +1232,8 @@
         </p:nvSpPr>
         <p:spPr>
           <a:xfrm>
-            <a:off x="4802429" y="3394634"/>
-            <a:ext cx="3701491" cy="761314"/>
+            <a:off x="4802429" y="3853053"/>
+            <a:ext cx="3701491" cy="320040"/>
           </a:xfrm>
           <a:prstGeom prst="rect">
             <a:avLst/>
@@ -1258,40 +1258,6 @@
                 <a:cs typeface="Microsoft YaHei" pitchFamily="34" charset="-120"/>
               </a:rPr>
               <a:t>· 运营连续</a:t>
-            </a:r>
-            <a:endParaRPr lang="en-US" sz="1600" dirty="0"/>
-          </a:p>
-          <a:p>
-            <a:pPr algn="l" indent="0" marL="0">
-              <a:buNone/>
-            </a:pPr>
-            <a:r>
-              <a:rPr lang="en-US" sz="1600" dirty="0">
-                <a:solidFill>
-                  <a:srgbClr val="1A1A1A"/>
-                </a:solidFill>
-                <a:latin typeface="Microsoft YaHei" pitchFamily="34" charset="0"/>
-                <a:ea typeface="Microsoft YaHei" pitchFamily="34" charset="-122"/>
-                <a:cs typeface="Microsoft YaHei" pitchFamily="34" charset="-120"/>
-              </a:rPr>
-              <a:t>· 公共性重建</a:t>
-            </a:r>
-            <a:endParaRPr lang="en-US" sz="1600" dirty="0"/>
-          </a:p>
-          <a:p>
-            <a:pPr algn="l" indent="0" marL="0">
-              <a:buNone/>
-            </a:pPr>
-            <a:r>
-              <a:rPr lang="en-US" sz="1600" dirty="0">
-                <a:solidFill>
-                  <a:srgbClr val="1A1A1A"/>
-                </a:solidFill>
-                <a:latin typeface="Microsoft YaHei" pitchFamily="34" charset="0"/>
-                <a:ea typeface="Microsoft YaHei" pitchFamily="34" charset="-122"/>
-                <a:cs typeface="Microsoft YaHei" pitchFamily="34" charset="-120"/>
-              </a:rPr>
-              <a:t>· 可达性提升</a:t>
             </a:r>
             <a:endParaRPr lang="en-US" sz="1600" dirty="0"/>
           </a:p>

--- a/tests/benchmark/architectural_slides/case_020_synthesis_canvas/output.pptx
+++ b/tests/benchmark/architectural_slides/case_020_synthesis_canvas/output.pptx
@@ -940,12 +940,19 @@
           </a:p>
         </p:txBody>
       </p:sp>
-      <p:sp>
-        <p:nvSpPr>
-          <p:cNvPr id="3" name="Shape 1"/>
-          <p:cNvSpPr/>
+      <p:pic>
+        <p:nvPicPr>
+          <p:cNvPr id="3" name="Image 0" descr="C:\Users\navib\Desktop\development\Archium-Agent\tests\benchmark\architectural_slides\case_020_synthesis_canvas\assets\c0200001-0001-4001-8001-000000000001.png">    </p:cNvPr>
+          <p:cNvPicPr>
+            <a:picLocks noChangeAspect="1"/>
+          </p:cNvPicPr>
           <p:nvPr/>
-        </p:nvSpPr>
+        </p:nvPicPr>
+        <p:blipFill>
+          <a:blip r:embed="rId1"/>
+          <a:srcRect l="0" r="0" t="0" b="0"/>
+          <a:stretch/>
+        </p:blipFill>
         <p:spPr>
           <a:xfrm>
             <a:off x="640080" y="1088898"/>
@@ -954,62 +961,21 @@
           <a:prstGeom prst="rect">
             <a:avLst/>
           </a:prstGeom>
-          <a:solidFill>
-            <a:srgbClr val="FFFFFF"/>
-          </a:solidFill>
-          <a:ln w="19050">
-            <a:solidFill>
-              <a:srgbClr val="C47B2B"/>
-            </a:solidFill>
-            <a:prstDash val="dash"/>
-          </a:ln>
         </p:spPr>
-      </p:sp>
-      <p:sp>
-        <p:nvSpPr>
-          <p:cNvPr id="4" name="Text 2"/>
-          <p:cNvSpPr/>
+      </p:pic>
+      <p:pic>
+        <p:nvPicPr>
+          <p:cNvPr id="4" name="Image 1" descr="C:\Users\navib\Desktop\development\Archium-Agent\tests\benchmark\architectural_slides\case_020_synthesis_canvas\assets\c0200002-0001-4001-8001-000000000002.png">    </p:cNvPr>
+          <p:cNvPicPr>
+            <a:picLocks noChangeAspect="1"/>
+          </p:cNvPicPr>
           <p:nvPr/>
-        </p:nvSpPr>
-        <p:spPr>
-          <a:xfrm>
-            <a:off x="777240" y="2439543"/>
-            <a:ext cx="3735629" cy="365760"/>
-          </a:xfrm>
-          <a:prstGeom prst="rect">
-            <a:avLst/>
-          </a:prstGeom>
-          <a:noFill/>
-          <a:ln/>
-        </p:spPr>
-        <p:txBody>
-          <a:bodyPr wrap="square" rtlCol="0" anchor="ctr"/>
-          <a:lstStyle/>
-          <a:p>
-            <a:pPr algn="ctr" indent="0" marL="0">
-              <a:buNone/>
-            </a:pPr>
-            <a:r>
-              <a:rPr lang="en-US" sz="1200" dirty="0">
-                <a:solidFill>
-                  <a:srgbClr val="777777"/>
-                </a:solidFill>
-                <a:latin typeface="Microsoft YaHei" pitchFamily="34" charset="0"/>
-                <a:ea typeface="Microsoft YaHei" pitchFamily="34" charset="-122"/>
-                <a:cs typeface="Microsoft YaHei" pitchFamily="34" charset="-120"/>
-              </a:rPr>
-              <a:t>技术图纸缺失</a:t>
-            </a:r>
-            <a:endParaRPr lang="en-US" sz="1200" dirty="0"/>
-          </a:p>
-        </p:txBody>
-      </p:sp>
-      <p:sp>
-        <p:nvSpPr>
-          <p:cNvPr id="5" name="Shape 3"/>
-          <p:cNvSpPr/>
-          <p:nvPr/>
-        </p:nvSpPr>
+        </p:nvPicPr>
+        <p:blipFill>
+          <a:blip r:embed="rId2"/>
+          <a:srcRect l="0" r="0" t="0" b="0"/>
+          <a:stretch/>
+        </p:blipFill>
         <p:spPr>
           <a:xfrm>
             <a:off x="4802429" y="1088898"/>
@@ -1018,59 +984,11 @@
           <a:prstGeom prst="rect">
             <a:avLst/>
           </a:prstGeom>
-          <a:solidFill>
-            <a:srgbClr val="FFFFFF"/>
-          </a:solidFill>
-          <a:ln w="19050">
-            <a:solidFill>
-              <a:srgbClr val="C47B2B"/>
-            </a:solidFill>
-            <a:prstDash val="dash"/>
-          </a:ln>
         </p:spPr>
-      </p:sp>
+      </p:pic>
       <p:sp>
         <p:nvSpPr>
-          <p:cNvPr id="6" name="Text 4"/>
-          <p:cNvSpPr/>
-          <p:nvPr/>
-        </p:nvSpPr>
-        <p:spPr>
-          <a:xfrm>
-            <a:off x="4939589" y="1488758"/>
-            <a:ext cx="3427171" cy="365760"/>
-          </a:xfrm>
-          <a:prstGeom prst="rect">
-            <a:avLst/>
-          </a:prstGeom>
-          <a:noFill/>
-          <a:ln/>
-        </p:spPr>
-        <p:txBody>
-          <a:bodyPr wrap="square" rtlCol="0" anchor="ctr"/>
-          <a:lstStyle/>
-          <a:p>
-            <a:pPr algn="ctr" indent="0" marL="0">
-              <a:buNone/>
-            </a:pPr>
-            <a:r>
-              <a:rPr lang="en-US" sz="1200" dirty="0">
-                <a:solidFill>
-                  <a:srgbClr val="777777"/>
-                </a:solidFill>
-                <a:latin typeface="Microsoft YaHei" pitchFamily="34" charset="0"/>
-                <a:ea typeface="Microsoft YaHei" pitchFamily="34" charset="-122"/>
-                <a:cs typeface="Microsoft YaHei" pitchFamily="34" charset="-120"/>
-              </a:rPr>
-              <a:t>素材缺失/路径未解析</a:t>
-            </a:r>
-            <a:endParaRPr lang="en-US" sz="1200" dirty="0"/>
-          </a:p>
-        </p:txBody>
-      </p:sp>
-      <p:sp>
-        <p:nvSpPr>
-          <p:cNvPr id="7" name="Text 5"/>
+          <p:cNvPr id="5" name="Text 1"/>
           <p:cNvSpPr/>
           <p:nvPr/>
         </p:nvSpPr>
@@ -1109,7 +1027,7 @@
       </p:sp>
       <p:sp>
         <p:nvSpPr>
-          <p:cNvPr id="8" name="Text 6"/>
+          <p:cNvPr id="6" name="Text 2"/>
           <p:cNvSpPr/>
           <p:nvPr/>
         </p:nvSpPr>
@@ -1148,7 +1066,7 @@
       </p:sp>
       <p:sp>
         <p:nvSpPr>
-          <p:cNvPr id="9" name="Text 7"/>
+          <p:cNvPr id="7" name="Text 3"/>
           <p:cNvSpPr/>
           <p:nvPr/>
         </p:nvSpPr>
@@ -1187,7 +1105,7 @@
       </p:sp>
       <p:sp>
         <p:nvSpPr>
-          <p:cNvPr id="10" name="Text 8"/>
+          <p:cNvPr id="8" name="Text 4"/>
           <p:cNvSpPr/>
           <p:nvPr/>
         </p:nvSpPr>
@@ -1226,7 +1144,7 @@
       </p:sp>
       <p:sp>
         <p:nvSpPr>
-          <p:cNvPr id="11" name="Text 9"/>
+          <p:cNvPr id="9" name="Text 5"/>
           <p:cNvSpPr/>
           <p:nvPr/>
         </p:nvSpPr>
@@ -1265,7 +1183,7 @@
       </p:sp>
       <p:sp>
         <p:nvSpPr>
-          <p:cNvPr id="12" name="Text 10"/>
+          <p:cNvPr id="10" name="Text 6"/>
           <p:cNvSpPr/>
           <p:nvPr/>
         </p:nvSpPr>

--- a/tests/benchmark/architectural_slides/case_020_synthesis_canvas/output.pptx
+++ b/tests/benchmark/architectural_slides/case_020_synthesis_canvas/output.pptx
@@ -988,7 +988,32 @@
       </p:pic>
       <p:sp>
         <p:nvSpPr>
-          <p:cNvPr id="5" name="Text 1"/>
+          <p:cNvPr id="5" name="Shape 1"/>
+          <p:cNvSpPr/>
+          <p:nvPr/>
+        </p:nvSpPr>
+        <p:spPr>
+          <a:xfrm>
+            <a:off x="4802429" y="2330577"/>
+            <a:ext cx="1208430" cy="772668"/>
+          </a:xfrm>
+          <a:prstGeom prst="rect">
+            <a:avLst/>
+          </a:prstGeom>
+          <a:solidFill>
+            <a:srgbClr val="FFFFFF"/>
+          </a:solidFill>
+          <a:ln w="12700">
+            <a:solidFill>
+              <a:srgbClr val="D9D5CF"/>
+            </a:solidFill>
+            <a:prstDash val="solid"/>
+          </a:ln>
+        </p:spPr>
+      </p:sp>
+      <p:sp>
+        <p:nvSpPr>
+          <p:cNvPr id="6" name="Text 2"/>
           <p:cNvSpPr/>
           <p:nvPr/>
         </p:nvSpPr>
@@ -1027,7 +1052,32 @@
       </p:sp>
       <p:sp>
         <p:nvSpPr>
-          <p:cNvPr id="6" name="Text 2"/>
+          <p:cNvPr id="7" name="Shape 3"/>
+          <p:cNvSpPr/>
+          <p:nvPr/>
+        </p:nvSpPr>
+        <p:spPr>
+          <a:xfrm>
+            <a:off x="6048959" y="2330577"/>
+            <a:ext cx="1208430" cy="772668"/>
+          </a:xfrm>
+          <a:prstGeom prst="rect">
+            <a:avLst/>
+          </a:prstGeom>
+          <a:solidFill>
+            <a:srgbClr val="FFFFFF"/>
+          </a:solidFill>
+          <a:ln w="12700">
+            <a:solidFill>
+              <a:srgbClr val="D9D5CF"/>
+            </a:solidFill>
+            <a:prstDash val="solid"/>
+          </a:ln>
+        </p:spPr>
+      </p:sp>
+      <p:sp>
+        <p:nvSpPr>
+          <p:cNvPr id="8" name="Text 4"/>
           <p:cNvSpPr/>
           <p:nvPr/>
         </p:nvSpPr>
@@ -1066,7 +1116,32 @@
       </p:sp>
       <p:sp>
         <p:nvSpPr>
-          <p:cNvPr id="7" name="Text 3"/>
+          <p:cNvPr id="9" name="Shape 5"/>
+          <p:cNvSpPr/>
+          <p:nvPr/>
+        </p:nvSpPr>
+        <p:spPr>
+          <a:xfrm>
+            <a:off x="7295490" y="2330577"/>
+            <a:ext cx="1208430" cy="772668"/>
+          </a:xfrm>
+          <a:prstGeom prst="rect">
+            <a:avLst/>
+          </a:prstGeom>
+          <a:solidFill>
+            <a:srgbClr val="FFFFFF"/>
+          </a:solidFill>
+          <a:ln w="12700">
+            <a:solidFill>
+              <a:srgbClr val="D9D5CF"/>
+            </a:solidFill>
+            <a:prstDash val="solid"/>
+          </a:ln>
+        </p:spPr>
+      </p:sp>
+      <p:sp>
+        <p:nvSpPr>
+          <p:cNvPr id="10" name="Text 6"/>
           <p:cNvSpPr/>
           <p:nvPr/>
         </p:nvSpPr>
@@ -1105,7 +1180,7 @@
       </p:sp>
       <p:sp>
         <p:nvSpPr>
-          <p:cNvPr id="8" name="Text 4"/>
+          <p:cNvPr id="11" name="Text 7"/>
           <p:cNvSpPr/>
           <p:nvPr/>
         </p:nvSpPr>
@@ -1144,7 +1219,7 @@
       </p:sp>
       <p:sp>
         <p:nvSpPr>
-          <p:cNvPr id="9" name="Text 5"/>
+          <p:cNvPr id="12" name="Text 8"/>
           <p:cNvSpPr/>
           <p:nvPr/>
         </p:nvSpPr>
@@ -1183,7 +1258,7 @@
       </p:sp>
       <p:sp>
         <p:nvSpPr>
-          <p:cNvPr id="10" name="Text 6"/>
+          <p:cNvPr id="13" name="Text 9"/>
           <p:cNvSpPr/>
           <p:nvPr/>
         </p:nvSpPr>

--- a/tests/benchmark/architectural_slides/case_020_synthesis_canvas/output.pptx
+++ b/tests/benchmark/architectural_slides/case_020_synthesis_canvas/output.pptx
@@ -910,7 +910,7 @@
         <p:spPr>
           <a:xfrm>
             <a:off x="640080" y="411480"/>
-            <a:ext cx="7863840" cy="601218"/>
+            <a:ext cx="7863840" cy="621792"/>
           </a:xfrm>
           <a:prstGeom prst="rect">
             <a:avLst/>
@@ -940,9 +940,34 @@
           </a:p>
         </p:txBody>
       </p:sp>
+      <p:sp>
+        <p:nvSpPr>
+          <p:cNvPr id="3" name="Shape 1"/>
+          <p:cNvSpPr/>
+          <p:nvPr/>
+        </p:nvSpPr>
+        <p:spPr>
+          <a:xfrm>
+            <a:off x="5573573" y="1109472"/>
+            <a:ext cx="2930347" cy="3046476"/>
+          </a:xfrm>
+          <a:prstGeom prst="rect">
+            <a:avLst/>
+          </a:prstGeom>
+          <a:solidFill>
+            <a:srgbClr val="F2F3F1"/>
+          </a:solidFill>
+          <a:ln w="12700">
+            <a:solidFill>
+              <a:srgbClr val="D9D5CF"/>
+            </a:solidFill>
+            <a:prstDash val="solid"/>
+          </a:ln>
+        </p:spPr>
+      </p:sp>
       <p:pic>
         <p:nvPicPr>
-          <p:cNvPr id="3" name="Image 0" descr="C:\Users\navib\Desktop\development\Archium-Agent\tests\benchmark\architectural_slides\case_020_synthesis_canvas\assets\c0200001-0001-4001-8001-000000000001.png">    </p:cNvPr>
+          <p:cNvPr id="4" name="Image 0" descr="C:\Users\navib\Desktop\development\Archium-Agent\tests\benchmark\architectural_slides\case_020_synthesis_canvas\assets\c0200001-0001-4001-8001-000000000001.png">    </p:cNvPr>
           <p:cNvPicPr>
             <a:picLocks noChangeAspect="1"/>
           </p:cNvPicPr>
@@ -955,8 +980,8 @@
         </p:blipFill>
         <p:spPr>
           <a:xfrm>
-            <a:off x="640080" y="1088898"/>
-            <a:ext cx="4009949" cy="3067050"/>
+            <a:off x="640080" y="1109472"/>
+            <a:ext cx="4781093" cy="3046476"/>
           </a:xfrm>
           <a:prstGeom prst="rect">
             <a:avLst/>
@@ -965,7 +990,7 @@
       </p:pic>
       <p:pic>
         <p:nvPicPr>
-          <p:cNvPr id="4" name="Image 1" descr="C:\Users\navib\Desktop\development\Archium-Agent\tests\benchmark\architectural_slides\case_020_synthesis_canvas\assets\c0200002-0001-4001-8001-000000000002.png">    </p:cNvPr>
+          <p:cNvPr id="5" name="Image 1" descr="C:\Users\navib\Desktop\development\Archium-Agent\tests\benchmark\architectural_slides\case_020_synthesis_canvas\assets\c0200002-0001-4001-8001-000000000002.png">    </p:cNvPr>
           <p:cNvPicPr>
             <a:picLocks noChangeAspect="1"/>
           </p:cNvPicPr>
@@ -978,8 +1003,8 @@
         </p:blipFill>
         <p:spPr>
           <a:xfrm>
-            <a:off x="4802429" y="1088898"/>
-            <a:ext cx="3701491" cy="1165479"/>
+            <a:off x="5573573" y="1109472"/>
+            <a:ext cx="2930347" cy="1157661"/>
           </a:xfrm>
           <a:prstGeom prst="rect">
             <a:avLst/>
@@ -988,14 +1013,14 @@
       </p:pic>
       <p:sp>
         <p:nvSpPr>
-          <p:cNvPr id="5" name="Shape 1"/>
+          <p:cNvPr id="6" name="Shape 2"/>
           <p:cNvSpPr/>
           <p:nvPr/>
         </p:nvSpPr>
         <p:spPr>
           <a:xfrm>
-            <a:off x="4802429" y="2330577"/>
-            <a:ext cx="1208430" cy="772668"/>
+            <a:off x="5573573" y="2343333"/>
+            <a:ext cx="951382" cy="1126815"/>
           </a:xfrm>
           <a:prstGeom prst="rect">
             <a:avLst/>
@@ -1013,14 +1038,14 @@
       </p:sp>
       <p:sp>
         <p:nvSpPr>
-          <p:cNvPr id="6" name="Text 2"/>
+          <p:cNvPr id="7" name="Text 3"/>
           <p:cNvSpPr/>
           <p:nvPr/>
         </p:nvSpPr>
         <p:spPr>
           <a:xfrm>
-            <a:off x="4802429" y="2330577"/>
-            <a:ext cx="1208430" cy="772668"/>
+            <a:off x="5573573" y="2343333"/>
+            <a:ext cx="951382" cy="1126815"/>
           </a:xfrm>
           <a:prstGeom prst="rect">
             <a:avLst/>
@@ -1052,14 +1077,14 @@
       </p:sp>
       <p:sp>
         <p:nvSpPr>
-          <p:cNvPr id="7" name="Shape 3"/>
+          <p:cNvPr id="8" name="Shape 4"/>
           <p:cNvSpPr/>
           <p:nvPr/>
         </p:nvSpPr>
         <p:spPr>
           <a:xfrm>
-            <a:off x="6048959" y="2330577"/>
-            <a:ext cx="1208430" cy="772668"/>
+            <a:off x="6563055" y="2343333"/>
+            <a:ext cx="951382" cy="1126815"/>
           </a:xfrm>
           <a:prstGeom prst="rect">
             <a:avLst/>
@@ -1077,14 +1102,14 @@
       </p:sp>
       <p:sp>
         <p:nvSpPr>
-          <p:cNvPr id="8" name="Text 4"/>
+          <p:cNvPr id="9" name="Text 5"/>
           <p:cNvSpPr/>
           <p:nvPr/>
         </p:nvSpPr>
         <p:spPr>
           <a:xfrm>
-            <a:off x="6048959" y="2330577"/>
-            <a:ext cx="1208430" cy="772668"/>
+            <a:off x="6563055" y="2343333"/>
+            <a:ext cx="951382" cy="1126815"/>
           </a:xfrm>
           <a:prstGeom prst="rect">
             <a:avLst/>
@@ -1116,14 +1141,14 @@
       </p:sp>
       <p:sp>
         <p:nvSpPr>
-          <p:cNvPr id="9" name="Shape 5"/>
+          <p:cNvPr id="10" name="Shape 6"/>
           <p:cNvSpPr/>
           <p:nvPr/>
         </p:nvSpPr>
         <p:spPr>
           <a:xfrm>
-            <a:off x="7295490" y="2330577"/>
-            <a:ext cx="1208430" cy="772668"/>
+            <a:off x="7552538" y="2343333"/>
+            <a:ext cx="951382" cy="1126815"/>
           </a:xfrm>
           <a:prstGeom prst="rect">
             <a:avLst/>
@@ -1141,14 +1166,14 @@
       </p:sp>
       <p:sp>
         <p:nvSpPr>
-          <p:cNvPr id="10" name="Text 6"/>
+          <p:cNvPr id="11" name="Text 7"/>
           <p:cNvSpPr/>
           <p:nvPr/>
         </p:nvSpPr>
         <p:spPr>
           <a:xfrm>
-            <a:off x="7295490" y="2330577"/>
-            <a:ext cx="1208430" cy="772668"/>
+            <a:off x="7552538" y="2343333"/>
+            <a:ext cx="951382" cy="1126815"/>
           </a:xfrm>
           <a:prstGeom prst="rect">
             <a:avLst/>
@@ -1180,14 +1205,14 @@
       </p:sp>
       <p:sp>
         <p:nvSpPr>
-          <p:cNvPr id="11" name="Text 7"/>
+          <p:cNvPr id="12" name="Text 8"/>
           <p:cNvSpPr/>
           <p:nvPr/>
         </p:nvSpPr>
         <p:spPr>
           <a:xfrm>
-            <a:off x="4802429" y="3179445"/>
-            <a:ext cx="3701491" cy="635508"/>
+            <a:off x="5573573" y="3546348"/>
+            <a:ext cx="2930347" cy="609600"/>
           </a:xfrm>
           <a:prstGeom prst="rect">
             <a:avLst/>
@@ -1214,45 +1239,6 @@
               <a:t>方案在保持运营连续的前提下，重建公共性与可达性。</a:t>
             </a:r>
             <a:endParaRPr lang="en-US" sz="1800" dirty="0"/>
-          </a:p>
-        </p:txBody>
-      </p:sp>
-      <p:sp>
-        <p:nvSpPr>
-          <p:cNvPr id="12" name="Text 8"/>
-          <p:cNvSpPr/>
-          <p:nvPr/>
-        </p:nvSpPr>
-        <p:spPr>
-          <a:xfrm>
-            <a:off x="4802429" y="3853053"/>
-            <a:ext cx="3701491" cy="320040"/>
-          </a:xfrm>
-          <a:prstGeom prst="rect">
-            <a:avLst/>
-          </a:prstGeom>
-          <a:noFill/>
-          <a:ln/>
-        </p:spPr>
-        <p:txBody>
-          <a:bodyPr wrap="square" rtlCol="0" anchor="t"/>
-          <a:lstStyle/>
-          <a:p>
-            <a:pPr algn="l" indent="0" marL="0">
-              <a:buNone/>
-            </a:pPr>
-            <a:r>
-              <a:rPr lang="en-US" sz="1600" dirty="0">
-                <a:solidFill>
-                  <a:srgbClr val="1A1A1A"/>
-                </a:solidFill>
-                <a:latin typeface="Microsoft YaHei" pitchFamily="34" charset="0"/>
-                <a:ea typeface="Microsoft YaHei" pitchFamily="34" charset="-122"/>
-                <a:cs typeface="Microsoft YaHei" pitchFamily="34" charset="-120"/>
-              </a:rPr>
-              <a:t>· 运营连续</a:t>
-            </a:r>
-            <a:endParaRPr lang="en-US" sz="1600" dirty="0"/>
           </a:p>
         </p:txBody>
       </p:sp>

--- a/tests/benchmark/architectural_slides/case_020_synthesis_canvas/output.pptx
+++ b/tests/benchmark/architectural_slides/case_020_synthesis_canvas/output.pptx
@@ -910,7 +910,7 @@
         <p:spPr>
           <a:xfrm>
             <a:off x="640080" y="411480"/>
-            <a:ext cx="7863840" cy="621792"/>
+            <a:ext cx="7863840" cy="601218"/>
           </a:xfrm>
           <a:prstGeom prst="rect">
             <a:avLst/>
@@ -948,8 +948,8 @@
         </p:nvSpPr>
         <p:spPr>
           <a:xfrm>
-            <a:off x="5573573" y="1109472"/>
-            <a:ext cx="2930347" cy="3046476"/>
+            <a:off x="5573573" y="1088898"/>
+            <a:ext cx="2930347" cy="3204210"/>
           </a:xfrm>
           <a:prstGeom prst="rect">
             <a:avLst/>
@@ -980,8 +980,8 @@
         </p:blipFill>
         <p:spPr>
           <a:xfrm>
-            <a:off x="640080" y="1109472"/>
-            <a:ext cx="4781093" cy="3046476"/>
+            <a:off x="640080" y="1088898"/>
+            <a:ext cx="4781093" cy="3204210"/>
           </a:xfrm>
           <a:prstGeom prst="rect">
             <a:avLst/>
@@ -1003,8 +1003,8 @@
         </p:blipFill>
         <p:spPr>
           <a:xfrm>
-            <a:off x="5573573" y="1109472"/>
-            <a:ext cx="2930347" cy="1157661"/>
+            <a:off x="5573573" y="1088898"/>
+            <a:ext cx="2930347" cy="1217600"/>
           </a:xfrm>
           <a:prstGeom prst="rect">
             <a:avLst/>
@@ -1019,8 +1019,8 @@
         </p:nvSpPr>
         <p:spPr>
           <a:xfrm>
-            <a:off x="5573573" y="2343333"/>
-            <a:ext cx="951382" cy="1126815"/>
+            <a:off x="5573573" y="2382698"/>
+            <a:ext cx="951382" cy="1149858"/>
           </a:xfrm>
           <a:prstGeom prst="rect">
             <a:avLst/>
@@ -1044,8 +1044,8 @@
         </p:nvSpPr>
         <p:spPr>
           <a:xfrm>
-            <a:off x="5573573" y="2343333"/>
-            <a:ext cx="951382" cy="1126815"/>
+            <a:off x="5573573" y="2382698"/>
+            <a:ext cx="951382" cy="1149858"/>
           </a:xfrm>
           <a:prstGeom prst="rect">
             <a:avLst/>
@@ -1083,8 +1083,8 @@
         </p:nvSpPr>
         <p:spPr>
           <a:xfrm>
-            <a:off x="6563055" y="2343333"/>
-            <a:ext cx="951382" cy="1126815"/>
+            <a:off x="6563055" y="2382698"/>
+            <a:ext cx="951382" cy="1149858"/>
           </a:xfrm>
           <a:prstGeom prst="rect">
             <a:avLst/>
@@ -1108,8 +1108,8 @@
         </p:nvSpPr>
         <p:spPr>
           <a:xfrm>
-            <a:off x="6563055" y="2343333"/>
-            <a:ext cx="951382" cy="1126815"/>
+            <a:off x="6563055" y="2382698"/>
+            <a:ext cx="951382" cy="1149858"/>
           </a:xfrm>
           <a:prstGeom prst="rect">
             <a:avLst/>
@@ -1147,8 +1147,8 @@
         </p:nvSpPr>
         <p:spPr>
           <a:xfrm>
-            <a:off x="7552538" y="2343333"/>
-            <a:ext cx="951382" cy="1126815"/>
+            <a:off x="7552538" y="2382698"/>
+            <a:ext cx="951382" cy="1149858"/>
           </a:xfrm>
           <a:prstGeom prst="rect">
             <a:avLst/>
@@ -1172,8 +1172,8 @@
         </p:nvSpPr>
         <p:spPr>
           <a:xfrm>
-            <a:off x="7552538" y="2343333"/>
-            <a:ext cx="951382" cy="1126815"/>
+            <a:off x="7552538" y="2382698"/>
+            <a:ext cx="951382" cy="1149858"/>
           </a:xfrm>
           <a:prstGeom prst="rect">
             <a:avLst/>
@@ -1211,8 +1211,8 @@
         </p:nvSpPr>
         <p:spPr>
           <a:xfrm>
-            <a:off x="5573573" y="3546348"/>
-            <a:ext cx="2930347" cy="609600"/>
+            <a:off x="5573573" y="3608756"/>
+            <a:ext cx="2930347" cy="635508"/>
           </a:xfrm>
           <a:prstGeom prst="rect">
             <a:avLst/>
